--- a/presentations/PL_L05_LanguageReviewHQ_Lesson.pptx
+++ b/presentations/PL_L05_LanguageReviewHQ_Lesson.pptx
@@ -2,30 +2,30 @@
 <file path=ppt/presentation.xml><?xml version="1.0" encoding="utf-8"?>
 <p:presentation xmlns:p="http://schemas.openxmlformats.org/presentationml/2006/main">
   <p:sldMasterIdLst>
-    <p:sldMasterId xmlns:r="http://schemas.openxmlformats.org/officeDocument/2006/relationships" id="2147483648" r:id="Rc9da1bedd4194827"/>
+    <p:sldMasterId xmlns:r="http://schemas.openxmlformats.org/officeDocument/2006/relationships" id="2147483648" r:id="Rdba358905c1146f1"/>
   </p:sldMasterIdLst>
   <p:notesMasterIdLst>
-    <p:notesMasterId xmlns:r="http://schemas.openxmlformats.org/officeDocument/2006/relationships" r:id="R0c68a9f8f4ba4e20"/>
+    <p:notesMasterId xmlns:r="http://schemas.openxmlformats.org/officeDocument/2006/relationships" r:id="R544a1e12d67c4602"/>
   </p:notesMasterIdLst>
   <p:sldIdLst>
-    <p:sldId xmlns:r="http://schemas.openxmlformats.org/officeDocument/2006/relationships" id="256" r:id="Rbf648d7cefa84ac2"/>
-    <p:sldId xmlns:r="http://schemas.openxmlformats.org/officeDocument/2006/relationships" id="257" r:id="Rb583355d0a344baa"/>
-    <p:sldId xmlns:r="http://schemas.openxmlformats.org/officeDocument/2006/relationships" id="258" r:id="R255eeddb20704365"/>
-    <p:sldId xmlns:r="http://schemas.openxmlformats.org/officeDocument/2006/relationships" id="259" r:id="R56ffaaf6d68f4e13"/>
-    <p:sldId xmlns:r="http://schemas.openxmlformats.org/officeDocument/2006/relationships" id="260" r:id="Ra7869dca483d4225"/>
-    <p:sldId xmlns:r="http://schemas.openxmlformats.org/officeDocument/2006/relationships" id="261" r:id="Ra6de72df3d874cb8"/>
-    <p:sldId xmlns:r="http://schemas.openxmlformats.org/officeDocument/2006/relationships" id="262" r:id="R13978cc220e34a84"/>
-    <p:sldId xmlns:r="http://schemas.openxmlformats.org/officeDocument/2006/relationships" id="263" r:id="R6d925f0342484859"/>
-    <p:sldId xmlns:r="http://schemas.openxmlformats.org/officeDocument/2006/relationships" id="264" r:id="R3cb09f7008994b69"/>
-    <p:sldId xmlns:r="http://schemas.openxmlformats.org/officeDocument/2006/relationships" id="265" r:id="Rc88c4c767c644665"/>
-    <p:sldId xmlns:r="http://schemas.openxmlformats.org/officeDocument/2006/relationships" id="266" r:id="R0b17e1bc5a1044bb"/>
-    <p:sldId xmlns:r="http://schemas.openxmlformats.org/officeDocument/2006/relationships" id="267" r:id="Rc64d27298bf54563"/>
-    <p:sldId xmlns:r="http://schemas.openxmlformats.org/officeDocument/2006/relationships" id="268" r:id="R60f5e0411bc74b6a"/>
-    <p:sldId xmlns:r="http://schemas.openxmlformats.org/officeDocument/2006/relationships" id="269" r:id="Rcabe52203eb74dad"/>
-    <p:sldId xmlns:r="http://schemas.openxmlformats.org/officeDocument/2006/relationships" id="270" r:id="R44dd34472bdc4ff6"/>
-    <p:sldId xmlns:r="http://schemas.openxmlformats.org/officeDocument/2006/relationships" id="271" r:id="R022f888ed84e49b2"/>
-    <p:sldId xmlns:r="http://schemas.openxmlformats.org/officeDocument/2006/relationships" id="272" r:id="Rac38319a424f4c6c"/>
-    <p:sldId xmlns:r="http://schemas.openxmlformats.org/officeDocument/2006/relationships" id="273" r:id="R26e82d113c414d22"/>
+    <p:sldId xmlns:r="http://schemas.openxmlformats.org/officeDocument/2006/relationships" id="256" r:id="Ra4bb7739c6b9478d"/>
+    <p:sldId xmlns:r="http://schemas.openxmlformats.org/officeDocument/2006/relationships" id="257" r:id="R7ef1d21eefc645e5"/>
+    <p:sldId xmlns:r="http://schemas.openxmlformats.org/officeDocument/2006/relationships" id="258" r:id="Rb9e7bb974510446f"/>
+    <p:sldId xmlns:r="http://schemas.openxmlformats.org/officeDocument/2006/relationships" id="259" r:id="R027a2236f47a4180"/>
+    <p:sldId xmlns:r="http://schemas.openxmlformats.org/officeDocument/2006/relationships" id="260" r:id="R6d74c0a20f5d4643"/>
+    <p:sldId xmlns:r="http://schemas.openxmlformats.org/officeDocument/2006/relationships" id="261" r:id="R7164fbcfdf4248ce"/>
+    <p:sldId xmlns:r="http://schemas.openxmlformats.org/officeDocument/2006/relationships" id="262" r:id="Ref3d7bc7d67944b7"/>
+    <p:sldId xmlns:r="http://schemas.openxmlformats.org/officeDocument/2006/relationships" id="263" r:id="Ra1b548711c01482a"/>
+    <p:sldId xmlns:r="http://schemas.openxmlformats.org/officeDocument/2006/relationships" id="264" r:id="Rea15d34e784a431d"/>
+    <p:sldId xmlns:r="http://schemas.openxmlformats.org/officeDocument/2006/relationships" id="265" r:id="Rb4f7939f4ae74c3a"/>
+    <p:sldId xmlns:r="http://schemas.openxmlformats.org/officeDocument/2006/relationships" id="266" r:id="Rec425ffab74d4f4f"/>
+    <p:sldId xmlns:r="http://schemas.openxmlformats.org/officeDocument/2006/relationships" id="267" r:id="Rda5f6f1828ca476f"/>
+    <p:sldId xmlns:r="http://schemas.openxmlformats.org/officeDocument/2006/relationships" id="268" r:id="Rcbb2eee5e9974740"/>
+    <p:sldId xmlns:r="http://schemas.openxmlformats.org/officeDocument/2006/relationships" id="269" r:id="R52335eb6ae134828"/>
+    <p:sldId xmlns:r="http://schemas.openxmlformats.org/officeDocument/2006/relationships" id="270" r:id="Rc0177d05e9a94a37"/>
+    <p:sldId xmlns:r="http://schemas.openxmlformats.org/officeDocument/2006/relationships" id="271" r:id="Ra2d5bdc68f344eca"/>
+    <p:sldId xmlns:r="http://schemas.openxmlformats.org/officeDocument/2006/relationships" id="272" r:id="R7ac73359fea04116"/>
+    <p:sldId xmlns:r="http://schemas.openxmlformats.org/officeDocument/2006/relationships" id="273" r:id="R0f1c3d335b9a4999"/>
   </p:sldIdLst>
   <p:sldSz cx="12192000" cy="6858000"/>
   <p:notesSz cx="6858000" cy="9144000"/>
@@ -459,7 +459,7 @@
           <a:lstStyle xmlns:a="http://schemas.openxmlformats.org/drawingml/2006/main"/>
           <a:p xmlns:a="http://schemas.openxmlformats.org/drawingml/2006/main">
             <a:r>
-              <a:t>Revise360 original lesson content. Teaching examples support OCR J277 Topic 2.5. The low-level instruction model is explanatory enrichment, not an additional required instruction set.</a:t>
+              <a:t>Revise360 original lesson content. Teaching examples support OCR J277 Topic 2.5. Scope: OCR J277 specification v3.1, May 2026, printed page 21, sections 2.5.1 and 2.5.2. https://www.ocr.org.uk/images/558027-specification-gcse-computer-science-j277.pdf</a:t>
             </a:r>
           </a:p>
         </p:txBody>
@@ -529,7 +529,7 @@
           <a:lstStyle xmlns:a="http://schemas.openxmlformats.org/drawingml/2006/main"/>
           <a:p xmlns:a="http://schemas.openxmlformats.org/drawingml/2006/main">
             <a:r>
-              <a:t>Revise360 original lesson content. Teaching examples support OCR J277 Topic 2.5. The low-level instruction model is explanatory enrichment, not an additional required instruction set.</a:t>
+              <a:t>Revise360 original lesson content. Teaching examples support OCR J277 Topic 2.5. Scope: OCR J277 specification v3.1, May 2026, printed page 21, sections 2.5.1 and 2.5.2. https://www.ocr.org.uk/images/558027-specification-gcse-computer-science-j277.pdf</a:t>
             </a:r>
           </a:p>
         </p:txBody>
@@ -599,7 +599,7 @@
           <a:lstStyle xmlns:a="http://schemas.openxmlformats.org/drawingml/2006/main"/>
           <a:p xmlns:a="http://schemas.openxmlformats.org/drawingml/2006/main">
             <a:r>
-              <a:t>Revise360 original lesson content. Teaching examples support OCR J277 Topic 2.5. The low-level instruction model is explanatory enrichment, not an additional required instruction set.</a:t>
+              <a:t>Revise360 original lesson content. Teaching examples support OCR J277 Topic 2.5. Scope: OCR J277 specification v3.1, May 2026, printed page 21, sections 2.5.1 and 2.5.2. https://www.ocr.org.uk/images/558027-specification-gcse-computer-science-j277.pdf</a:t>
             </a:r>
           </a:p>
         </p:txBody>
@@ -669,7 +669,7 @@
           <a:lstStyle xmlns:a="http://schemas.openxmlformats.org/drawingml/2006/main"/>
           <a:p xmlns:a="http://schemas.openxmlformats.org/drawingml/2006/main">
             <a:r>
-              <a:t>Revise360 original lesson content. Teaching examples support OCR J277 Topic 2.5. The low-level instruction model is explanatory enrichment, not an additional required instruction set.</a:t>
+              <a:t>Revise360 original lesson content. Teaching examples support OCR J277 Topic 2.5. Scope: OCR J277 specification v3.1, May 2026, printed page 21, sections 2.5.1 and 2.5.2. https://www.ocr.org.uk/images/558027-specification-gcse-computer-science-j277.pdf</a:t>
             </a:r>
           </a:p>
         </p:txBody>
@@ -739,7 +739,7 @@
           <a:lstStyle xmlns:a="http://schemas.openxmlformats.org/drawingml/2006/main"/>
           <a:p xmlns:a="http://schemas.openxmlformats.org/drawingml/2006/main">
             <a:r>
-              <a:t>Revise360 original lesson content. Teaching examples support OCR J277 Topic 2.5. The low-level instruction model is explanatory enrichment, not an additional required instruction set.</a:t>
+              <a:t>Revise360 original lesson content. Teaching examples support OCR J277 Topic 2.5. Scope: OCR J277 specification v3.1, May 2026, printed page 21, sections 2.5.1 and 2.5.2. https://www.ocr.org.uk/images/558027-specification-gcse-computer-science-j277.pdf</a:t>
             </a:r>
           </a:p>
         </p:txBody>
@@ -809,7 +809,7 @@
           <a:lstStyle xmlns:a="http://schemas.openxmlformats.org/drawingml/2006/main"/>
           <a:p xmlns:a="http://schemas.openxmlformats.org/drawingml/2006/main">
             <a:r>
-              <a:t>Revise360 original lesson content. Teaching examples support OCR J277 Topic 2.5. The low-level instruction model is explanatory enrichment, not an additional required instruction set.</a:t>
+              <a:t>Revise360 original lesson content. Teaching examples support OCR J277 Topic 2.5. Scope: OCR J277 specification v3.1, May 2026, printed page 21, sections 2.5.1 and 2.5.2. https://www.ocr.org.uk/images/558027-specification-gcse-computer-science-j277.pdf</a:t>
             </a:r>
           </a:p>
         </p:txBody>
@@ -879,7 +879,7 @@
           <a:lstStyle xmlns:a="http://schemas.openxmlformats.org/drawingml/2006/main"/>
           <a:p xmlns:a="http://schemas.openxmlformats.org/drawingml/2006/main">
             <a:r>
-              <a:t>Revise360 original lesson content. Teaching examples support OCR J277 Topic 2.5. The low-level instruction model is explanatory enrichment, not an additional required instruction set.</a:t>
+              <a:t>Revise360 original lesson content. Teaching examples support OCR J277 Topic 2.5. Scope: OCR J277 specification v3.1, May 2026, printed page 21, sections 2.5.1 and 2.5.2. https://www.ocr.org.uk/images/558027-specification-gcse-computer-science-j277.pdf</a:t>
             </a:r>
           </a:p>
         </p:txBody>
@@ -949,7 +949,7 @@
           <a:lstStyle xmlns:a="http://schemas.openxmlformats.org/drawingml/2006/main"/>
           <a:p xmlns:a="http://schemas.openxmlformats.org/drawingml/2006/main">
             <a:r>
-              <a:t>Revise360 original lesson content. Teaching examples support OCR J277 Topic 2.5. The low-level instruction model is explanatory enrichment, not an additional required instruction set.</a:t>
+              <a:t>Revise360 original lesson content. Teaching examples support OCR J277 Topic 2.5. Scope: OCR J277 specification v3.1, May 2026, printed page 21, sections 2.5.1 and 2.5.2. https://www.ocr.org.uk/images/558027-specification-gcse-computer-science-j277.pdf</a:t>
             </a:r>
           </a:p>
         </p:txBody>
@@ -1019,7 +1019,7 @@
           <a:lstStyle xmlns:a="http://schemas.openxmlformats.org/drawingml/2006/main"/>
           <a:p xmlns:a="http://schemas.openxmlformats.org/drawingml/2006/main">
             <a:r>
-              <a:t>Revise360 original lesson content. Teaching examples support OCR J277 Topic 2.5. The low-level instruction model is explanatory enrichment, not an additional required instruction set.</a:t>
+              <a:t>Revise360 original lesson content. Teaching examples support OCR J277 Topic 2.5. Scope: OCR J277 specification v3.1, May 2026, printed page 21, sections 2.5.1 and 2.5.2. https://www.ocr.org.uk/images/558027-specification-gcse-computer-science-j277.pdf</a:t>
             </a:r>
           </a:p>
         </p:txBody>
@@ -1089,7 +1089,7 @@
           <a:lstStyle xmlns:a="http://schemas.openxmlformats.org/drawingml/2006/main"/>
           <a:p xmlns:a="http://schemas.openxmlformats.org/drawingml/2006/main">
             <a:r>
-              <a:t>Revise360 original lesson content. Teaching examples support OCR J277 Topic 2.5. The low-level instruction model is explanatory enrichment, not an additional required instruction set.</a:t>
+              <a:t>Revise360 original lesson content. Teaching examples support OCR J277 Topic 2.5. Scope: OCR J277 specification v3.1, May 2026, printed page 21, sections 2.5.1 and 2.5.2. https://www.ocr.org.uk/images/558027-specification-gcse-computer-science-j277.pdf</a:t>
             </a:r>
           </a:p>
         </p:txBody>
@@ -1159,7 +1159,7 @@
           <a:lstStyle xmlns:a="http://schemas.openxmlformats.org/drawingml/2006/main"/>
           <a:p xmlns:a="http://schemas.openxmlformats.org/drawingml/2006/main">
             <a:r>
-              <a:t>Revise360 original lesson content. Teaching examples support OCR J277 Topic 2.5. The low-level instruction model is explanatory enrichment, not an additional required instruction set.</a:t>
+              <a:t>Revise360 original lesson content. Teaching examples support OCR J277 Topic 2.5. Scope: OCR J277 specification v3.1, May 2026, printed page 21, sections 2.5.1 and 2.5.2. https://www.ocr.org.uk/images/558027-specification-gcse-computer-science-j277.pdf</a:t>
             </a:r>
           </a:p>
         </p:txBody>
@@ -1229,7 +1229,7 @@
           <a:lstStyle xmlns:a="http://schemas.openxmlformats.org/drawingml/2006/main"/>
           <a:p xmlns:a="http://schemas.openxmlformats.org/drawingml/2006/main">
             <a:r>
-              <a:t>Revise360 original lesson content. Teaching examples support OCR J277 Topic 2.5. The low-level instruction model is explanatory enrichment, not an additional required instruction set.</a:t>
+              <a:t>Revise360 original lesson content. Teaching examples support OCR J277 Topic 2.5. Scope: OCR J277 specification v3.1, May 2026, printed page 21, sections 2.5.1 and 2.5.2. https://www.ocr.org.uk/images/558027-specification-gcse-computer-science-j277.pdf</a:t>
             </a:r>
           </a:p>
         </p:txBody>
@@ -1299,7 +1299,7 @@
           <a:lstStyle xmlns:a="http://schemas.openxmlformats.org/drawingml/2006/main"/>
           <a:p xmlns:a="http://schemas.openxmlformats.org/drawingml/2006/main">
             <a:r>
-              <a:t>Revise360 original lesson content. Teaching examples support OCR J277 Topic 2.5. The low-level instruction model is explanatory enrichment, not an additional required instruction set.</a:t>
+              <a:t>Revise360 original lesson content. Teaching examples support OCR J277 Topic 2.5. Scope: OCR J277 specification v3.1, May 2026, printed page 21, sections 2.5.1 and 2.5.2. https://www.ocr.org.uk/images/558027-specification-gcse-computer-science-j277.pdf</a:t>
             </a:r>
           </a:p>
         </p:txBody>
@@ -1369,7 +1369,7 @@
           <a:lstStyle xmlns:a="http://schemas.openxmlformats.org/drawingml/2006/main"/>
           <a:p xmlns:a="http://schemas.openxmlformats.org/drawingml/2006/main">
             <a:r>
-              <a:t>Revise360 original lesson content. Teaching examples support OCR J277 Topic 2.5. The low-level instruction model is explanatory enrichment, not an additional required instruction set.</a:t>
+              <a:t>Revise360 original lesson content. Teaching examples support OCR J277 Topic 2.5. Scope: OCR J277 specification v3.1, May 2026, printed page 21, sections 2.5.1 and 2.5.2. https://www.ocr.org.uk/images/558027-specification-gcse-computer-science-j277.pdf</a:t>
             </a:r>
           </a:p>
         </p:txBody>
@@ -1439,7 +1439,7 @@
           <a:lstStyle xmlns:a="http://schemas.openxmlformats.org/drawingml/2006/main"/>
           <a:p xmlns:a="http://schemas.openxmlformats.org/drawingml/2006/main">
             <a:r>
-              <a:t>Revise360 original lesson content. Teaching examples support OCR J277 Topic 2.5. The low-level instruction model is explanatory enrichment, not an additional required instruction set.</a:t>
+              <a:t>Revise360 original lesson content. Teaching examples support OCR J277 Topic 2.5. Scope: OCR J277 specification v3.1, May 2026, printed page 21, sections 2.5.1 and 2.5.2. https://www.ocr.org.uk/images/558027-specification-gcse-computer-science-j277.pdf</a:t>
             </a:r>
           </a:p>
         </p:txBody>
@@ -1509,7 +1509,7 @@
           <a:lstStyle xmlns:a="http://schemas.openxmlformats.org/drawingml/2006/main"/>
           <a:p xmlns:a="http://schemas.openxmlformats.org/drawingml/2006/main">
             <a:r>
-              <a:t>Revise360 original lesson content. Teaching examples support OCR J277 Topic 2.5. The low-level instruction model is explanatory enrichment, not an additional required instruction set.</a:t>
+              <a:t>Revise360 original lesson content. Teaching examples support OCR J277 Topic 2.5. Scope: OCR J277 specification v3.1, May 2026, printed page 21, sections 2.5.1 and 2.5.2. https://www.ocr.org.uk/images/558027-specification-gcse-computer-science-j277.pdf</a:t>
             </a:r>
           </a:p>
         </p:txBody>
@@ -1579,7 +1579,7 @@
           <a:lstStyle xmlns:a="http://schemas.openxmlformats.org/drawingml/2006/main"/>
           <a:p xmlns:a="http://schemas.openxmlformats.org/drawingml/2006/main">
             <a:r>
-              <a:t>Revise360 original lesson content. Teaching examples support OCR J277 Topic 2.5. The low-level instruction model is explanatory enrichment, not an additional required instruction set.</a:t>
+              <a:t>Revise360 original lesson content. Teaching examples support OCR J277 Topic 2.5. Scope: OCR J277 specification v3.1, May 2026, printed page 21, sections 2.5.1 and 2.5.2. https://www.ocr.org.uk/images/558027-specification-gcse-computer-science-j277.pdf</a:t>
             </a:r>
           </a:p>
         </p:txBody>
@@ -1649,7 +1649,7 @@
           <a:lstStyle xmlns:a="http://schemas.openxmlformats.org/drawingml/2006/main"/>
           <a:p xmlns:a="http://schemas.openxmlformats.org/drawingml/2006/main">
             <a:r>
-              <a:t>Revise360 original lesson content. Teaching examples support OCR J277 Topic 2.5. The low-level instruction model is explanatory enrichment, not an additional required instruction set.</a:t>
+              <a:t>Revise360 original lesson content. Teaching examples support OCR J277 Topic 2.5. Scope: OCR J277 specification v3.1, May 2026, printed page 21, sections 2.5.1 and 2.5.2. https://www.ocr.org.uk/images/558027-specification-gcse-computer-science-j277.pdf</a:t>
             </a:r>
           </a:p>
         </p:txBody>
@@ -1717,7 +1717,7 @@
   </p:cSld>
   <p:clrMap bg1="lt1" tx1="dk1" bg2="lt2" tx2="dk2" accent1="accent1" accent2="accent2" accent3="accent3" accent4="accent4" accent5="accent5" accent6="accent6" hlink="hlink" folHlink="folHlink"/>
   <p:sldLayoutIdLst>
-    <p:sldLayoutId xmlns:r="http://schemas.openxmlformats.org/officeDocument/2006/relationships" id="2147483649" r:id="R8c96baf5bc454f0a"/>
+    <p:sldLayoutId xmlns:r="http://schemas.openxmlformats.org/officeDocument/2006/relationships" id="2147483649" r:id="R1946de00098544ac"/>
   </p:sldLayoutIdLst>
   <p:txStyles>
     <p:titleStyle>
@@ -2418,7 +2418,7 @@
           <p:nvPr/>
         </p:nvPicPr>
         <p:blipFill>
-          <a:blip xmlns:r="http://schemas.openxmlformats.org/officeDocument/2006/relationships" xmlns:a="http://schemas.openxmlformats.org/drawingml/2006/main" r:embed="Rfd06610491324aa1"/>
+          <a:blip xmlns:r="http://schemas.openxmlformats.org/officeDocument/2006/relationships" xmlns:a="http://schemas.openxmlformats.org/drawingml/2006/main" r:embed="R5678261a18ae4687"/>
           <a:stretch xmlns:a="http://schemas.openxmlformats.org/drawingml/2006/main"/>
         </p:blipFill>
         <p:spPr>
@@ -2672,7 +2672,7 @@
           <p:nvPr/>
         </p:nvPicPr>
         <p:blipFill>
-          <a:blip xmlns:r="http://schemas.openxmlformats.org/officeDocument/2006/relationships" xmlns:a="http://schemas.openxmlformats.org/drawingml/2006/main" r:embed="R66d47087bece4890"/>
+          <a:blip xmlns:r="http://schemas.openxmlformats.org/officeDocument/2006/relationships" xmlns:a="http://schemas.openxmlformats.org/drawingml/2006/main" r:embed="R38e5ccf1d32942c7"/>
           <a:stretch xmlns:a="http://schemas.openxmlformats.org/drawingml/2006/main"/>
         </p:blipFill>
         <p:spPr>
@@ -2869,7 +2869,7 @@
           <p:nvPr/>
         </p:nvPicPr>
         <p:blipFill>
-          <a:blip xmlns:r="http://schemas.openxmlformats.org/officeDocument/2006/relationships" xmlns:a="http://schemas.openxmlformats.org/drawingml/2006/main" r:embed="Rc5bc6acb730e418a"/>
+          <a:blip xmlns:r="http://schemas.openxmlformats.org/officeDocument/2006/relationships" xmlns:a="http://schemas.openxmlformats.org/drawingml/2006/main" r:embed="Rc979f30c0f404117"/>
           <a:stretch xmlns:a="http://schemas.openxmlformats.org/drawingml/2006/main"/>
         </p:blipFill>
         <p:spPr>
@@ -3109,7 +3109,7 @@
                 <a:ea typeface="DejaVu Sans"/>
                 <a:cs typeface="DejaVu Sans"/>
               </a:rPr>
-              <a:t>Use a breakpoint to pause near the faulty calculation, then inspect variable values to locate the error.</a:t>
+              <a:t>Error diagnostics can identify the problem and its location, helping the programmer find the source to correct.</a:t>
             </a:r>
           </a:p>
         </p:txBody>
@@ -3414,7 +3414,7 @@
           <p:nvPr/>
         </p:nvPicPr>
         <p:blipFill>
-          <a:blip xmlns:r="http://schemas.openxmlformats.org/officeDocument/2006/relationships" xmlns:a="http://schemas.openxmlformats.org/drawingml/2006/main" r:embed="R8e7746dc170d423b"/>
+          <a:blip xmlns:r="http://schemas.openxmlformats.org/officeDocument/2006/relationships" xmlns:a="http://schemas.openxmlformats.org/drawingml/2006/main" r:embed="Re84da1d2b73247b0"/>
           <a:stretch xmlns:a="http://schemas.openxmlformats.org/drawingml/2006/main"/>
         </p:blipFill>
         <p:spPr>
@@ -3712,7 +3712,7 @@
                 <a:ea typeface="DejaVu Sans"/>
                 <a:cs typeface="DejaVu Sans"/>
               </a:rPr>
-              <a:t>2  Representations</a:t>
+              <a:t>2  Source and execution</a:t>
             </a:r>
           </a:p>
         </p:txBody>
@@ -3770,7 +3770,7 @@
                 <a:ea typeface="DejaVu Sans"/>
                 <a:cs typeface="DejaVu Sans"/>
               </a:rPr>
-              <a:t>Both closely relate to a processor instruction set, even though assembly uses readable mnemonics.</a:t>
+              <a:t>Its instruction set uses machine code. The high-level source must be translated for its instructions to execute.</a:t>
             </a:r>
           </a:p>
         </p:txBody>
@@ -4075,7 +4075,7 @@
           <p:nvPr/>
         </p:nvPicPr>
         <p:blipFill>
-          <a:blip xmlns:r="http://schemas.openxmlformats.org/officeDocument/2006/relationships" xmlns:a="http://schemas.openxmlformats.org/drawingml/2006/main" r:embed="R9dbce1c68618461d"/>
+          <a:blip xmlns:r="http://schemas.openxmlformats.org/officeDocument/2006/relationships" xmlns:a="http://schemas.openxmlformats.org/drawingml/2006/main" r:embed="Rc918fc6e63104dea"/>
           <a:stretch xmlns:a="http://schemas.openxmlformats.org/drawingml/2006/main"/>
         </p:blipFill>
         <p:spPr>
@@ -4257,7 +4257,7 @@
                 <a:ea typeface="DejaVu Sans"/>
                 <a:cs typeface="DejaVu Sans"/>
               </a:rPr>
-              <a:t>4  IDE evidence</a:t>
+              <a:t>4  Editing and diagnostics</a:t>
             </a:r>
           </a:p>
         </p:txBody>
@@ -4315,7 +4315,7 @@
                 <a:ea typeface="DejaVu Sans"/>
                 <a:cs typeface="DejaVu Sans"/>
               </a:rPr>
-              <a:t>Pause before the calculation with a breakpoint, inspect inputs, step over the line and inspect the total.</a:t>
+              <a:t>The diagnostic helps locate and explain the problem. The programmer uses the editor to change the source.</a:t>
             </a:r>
           </a:p>
         </p:txBody>
@@ -4373,7 +4373,7 @@
                 <a:ea typeface="DejaVu Sans"/>
                 <a:cs typeface="DejaVu Sans"/>
               </a:rPr>
-              <a:t>5  Interpreting a trace</a:t>
+              <a:t>5  Translation and running</a:t>
             </a:r>
           </a:p>
         </p:txBody>
@@ -4431,7 +4431,7 @@
                 <a:ea typeface="DejaVu Sans"/>
                 <a:cs typeface="DejaVu Sans"/>
               </a:rPr>
-              <a:t>After addition: 13. After subtraction: 9.</a:t>
+              <a:t>The translator processes the source. The run-time environment executes it and lets you observe output.</a:t>
             </a:r>
           </a:p>
         </p:txBody>
@@ -4547,7 +4547,7 @@
                 <a:ea typeface="DejaVu Sans"/>
                 <a:cs typeface="DejaVu Sans"/>
               </a:rPr>
-              <a:t>Use a breakpoint to pause near the faulty calculation, then inspect variable values to locate the error.</a:t>
+              <a:t>Error diagnostics can identify the problem and its location, helping the programmer find the source to correct.</a:t>
             </a:r>
           </a:p>
         </p:txBody>
@@ -4736,7 +4736,7 @@
           <p:nvPr/>
         </p:nvPicPr>
         <p:blipFill>
-          <a:blip xmlns:r="http://schemas.openxmlformats.org/officeDocument/2006/relationships" xmlns:a="http://schemas.openxmlformats.org/drawingml/2006/main" r:embed="Rc60d912d14b4489e"/>
+          <a:blip xmlns:r="http://schemas.openxmlformats.org/officeDocument/2006/relationships" xmlns:a="http://schemas.openxmlformats.org/drawingml/2006/main" r:embed="R41132d4e741747a9"/>
           <a:stretch xmlns:a="http://schemas.openxmlformats.org/drawingml/2006/main"/>
         </p:blipFill>
         <p:spPr>
@@ -4976,7 +4976,7 @@
                 <a:ea typeface="DejaVu Sans"/>
                 <a:cs typeface="DejaVu Sans"/>
               </a:rPr>
-              <a:t>Quickly test frequent source changes: Interpreter. Maintain a frequently updated app: High-level language. Pause before a suspected faulty line: Breakpoint. Execute instructions directly on a compatible CPU: Machine code</a:t>
+              <a:t>Quickly try frequent source edits: Interpreter. Maintain a frequently updated app: High-level language. Describe a detected source problem: Error diagnostics. Run the program and see output: Run-time environment</a:t>
             </a:r>
           </a:p>
           <a:p xmlns:a="http://schemas.openxmlformats.org/drawingml/2006/main">
@@ -5024,7 +5024,7 @@
                 <a:ea typeface="DejaVu Sans"/>
                 <a:cs typeface="DejaVu Sans"/>
               </a:rPr>
-              <a:t>Successful translation does not guarantee correct logic. Hardware compatibility matters for machine code</a:t>
+              <a:t>Low-level code gives detailed hardware control. Compiled code can run again without source translation</a:t>
             </a:r>
           </a:p>
         </p:txBody>
@@ -5793,7 +5793,7 @@
           <p:nvPr/>
         </p:nvPicPr>
         <p:blipFill>
-          <a:blip xmlns:r="http://schemas.openxmlformats.org/officeDocument/2006/relationships" xmlns:a="http://schemas.openxmlformats.org/drawingml/2006/main" r:embed="Rdec8aed464364778"/>
+          <a:blip xmlns:r="http://schemas.openxmlformats.org/officeDocument/2006/relationships" xmlns:a="http://schemas.openxmlformats.org/drawingml/2006/main" r:embed="R6ec44ad4792942ea"/>
           <a:stretch xmlns:a="http://schemas.openxmlformats.org/drawingml/2006/main"/>
         </p:blipFill>
         <p:spPr>
@@ -6338,7 +6338,7 @@
           <p:nvPr/>
         </p:nvPicPr>
         <p:blipFill>
-          <a:blip xmlns:r="http://schemas.openxmlformats.org/officeDocument/2006/relationships" xmlns:a="http://schemas.openxmlformats.org/drawingml/2006/main" r:embed="Re3866c4eda0f4dc8"/>
+          <a:blip xmlns:r="http://schemas.openxmlformats.org/officeDocument/2006/relationships" xmlns:a="http://schemas.openxmlformats.org/drawingml/2006/main" r:embed="Rad6ef03cc5724033"/>
           <a:stretch xmlns:a="http://schemas.openxmlformats.org/drawingml/2006/main"/>
         </p:blipFill>
         <p:spPr>
@@ -6578,7 +6578,7 @@
                 <a:ea typeface="DejaVu Sans"/>
                 <a:cs typeface="DejaVu Sans"/>
               </a:rPr>
-              <a:t>A bill is wrong even though the program runs. Explain how two IDE debugging facilities could help. [4]</a:t>
+              <a:t>Explain how an editor and error diagnostics help a programmer correct source code. [4]</a:t>
             </a:r>
           </a:p>
         </p:txBody>
@@ -6825,7 +6825,7 @@
           <p:nvPr/>
         </p:nvPicPr>
         <p:blipFill>
-          <a:blip xmlns:r="http://schemas.openxmlformats.org/officeDocument/2006/relationships" xmlns:a="http://schemas.openxmlformats.org/drawingml/2006/main" r:embed="R8ca63dcf241447cb"/>
+          <a:blip xmlns:r="http://schemas.openxmlformats.org/officeDocument/2006/relationships" xmlns:a="http://schemas.openxmlformats.org/drawingml/2006/main" r:embed="Re97b385b9c6f41f8"/>
           <a:stretch xmlns:a="http://schemas.openxmlformats.org/drawingml/2006/main"/>
         </p:blipFill>
         <p:spPr>
@@ -7254,7 +7254,7 @@
           <p:nvPr/>
         </p:nvPicPr>
         <p:blipFill>
-          <a:blip xmlns:r="http://schemas.openxmlformats.org/officeDocument/2006/relationships" xmlns:a="http://schemas.openxmlformats.org/drawingml/2006/main" r:embed="R70896a7dddcb43d9"/>
+          <a:blip xmlns:r="http://schemas.openxmlformats.org/officeDocument/2006/relationships" xmlns:a="http://schemas.openxmlformats.org/drawingml/2006/main" r:embed="R97cad8def4a140b1"/>
           <a:stretch xmlns:a="http://schemas.openxmlformats.org/drawingml/2006/main"/>
         </p:blipFill>
         <p:spPr>
@@ -7494,7 +7494,7 @@
                 <a:ea typeface="DejaVu Sans"/>
                 <a:cs typeface="DejaVu Sans"/>
               </a:rPr>
-              <a:t>A breakpoint pauses execution near the calculation.</a:t>
+              <a:t>Diagnostics describe a detected problem.</a:t>
             </a:r>
           </a:p>
         </p:txBody>
@@ -7610,7 +7610,7 @@
                 <a:ea typeface="DejaVu Sans"/>
                 <a:cs typeface="DejaVu Sans"/>
               </a:rPr>
-              <a:t>This allows inspection before or after the suspected operation.</a:t>
+              <a:t>A reported location helps the programmer find it.</a:t>
             </a:r>
           </a:p>
         </p:txBody>
@@ -7726,7 +7726,7 @@
                 <a:ea typeface="DejaVu Sans"/>
                 <a:cs typeface="DejaVu Sans"/>
               </a:rPr>
-              <a:t>A variable watch shows current input or result values. Comparing these with expected values helps locate the fault.</a:t>
+              <a:t>The editor lets the programmer change source text. The programmer uses it to correct the identified instruction.</a:t>
             </a:r>
           </a:p>
         </p:txBody>
@@ -7915,7 +7915,7 @@
           <p:nvPr/>
         </p:nvPicPr>
         <p:blipFill>
-          <a:blip xmlns:r="http://schemas.openxmlformats.org/officeDocument/2006/relationships" xmlns:a="http://schemas.openxmlformats.org/drawingml/2006/main" r:embed="R6575ac7587ba4f0f"/>
+          <a:blip xmlns:r="http://schemas.openxmlformats.org/officeDocument/2006/relationships" xmlns:a="http://schemas.openxmlformats.org/drawingml/2006/main" r:embed="R2da3157343594c9b"/>
           <a:stretch xmlns:a="http://schemas.openxmlformats.org/drawingml/2006/main"/>
         </p:blipFill>
         <p:spPr>
@@ -8692,7 +8692,7 @@
           <p:nvPr/>
         </p:nvPicPr>
         <p:blipFill>
-          <a:blip xmlns:r="http://schemas.openxmlformats.org/officeDocument/2006/relationships" xmlns:a="http://schemas.openxmlformats.org/drawingml/2006/main" r:embed="Rbfd1c735fae74134"/>
+          <a:blip xmlns:r="http://schemas.openxmlformats.org/officeDocument/2006/relationships" xmlns:a="http://schemas.openxmlformats.org/drawingml/2006/main" r:embed="Ra910c713b4f04ac5"/>
           <a:stretch xmlns:a="http://schemas.openxmlformats.org/drawingml/2006/main"/>
         </p:blipFill>
         <p:spPr>
@@ -9411,7 +9411,7 @@
           <p:nvPr/>
         </p:nvPicPr>
         <p:blipFill>
-          <a:blip xmlns:r="http://schemas.openxmlformats.org/officeDocument/2006/relationships" xmlns:a="http://schemas.openxmlformats.org/drawingml/2006/main" r:embed="Rec503aea7b354d18"/>
+          <a:blip xmlns:r="http://schemas.openxmlformats.org/officeDocument/2006/relationships" xmlns:a="http://schemas.openxmlformats.org/drawingml/2006/main" r:embed="R8547c2c779774531"/>
           <a:stretch xmlns:a="http://schemas.openxmlformats.org/drawingml/2006/main"/>
         </p:blipFill>
         <p:spPr>
@@ -9535,7 +9535,7 @@
                 <a:ea typeface="DejaVu Sans"/>
                 <a:cs typeface="DejaVu Sans"/>
               </a:rPr>
-              <a:t>A quiz app runs successfully but awards every answer a mark. Is this evidence that the logic is correct? Explain.</a:t>
+              <a:t>A programmer wants readable source that is easy to update. Which language level usually suits this requirement, and why?</a:t>
             </a:r>
           </a:p>
         </p:txBody>
@@ -9724,7 +9724,7 @@
           <p:nvPr/>
         </p:nvPicPr>
         <p:blipFill>
-          <a:blip xmlns:r="http://schemas.openxmlformats.org/officeDocument/2006/relationships" xmlns:a="http://schemas.openxmlformats.org/drawingml/2006/main" r:embed="Rbc5b422c5fb24176"/>
+          <a:blip xmlns:r="http://schemas.openxmlformats.org/officeDocument/2006/relationships" xmlns:a="http://schemas.openxmlformats.org/drawingml/2006/main" r:embed="R1671a20116a147b7"/>
           <a:stretch xmlns:a="http://schemas.openxmlformats.org/drawingml/2006/main"/>
         </p:blipFill>
         <p:spPr>
@@ -9906,7 +9906,7 @@
                 <a:ea typeface="DejaVu Sans"/>
                 <a:cs typeface="DejaVu Sans"/>
               </a:rPr>
-              <a:t>No. Running without an error does not prove the rules are correct. Test correct and incorrect answers against expected scores.</a:t>
+              <a:t>A high-level language usually suits it because readable words and structures make the code easier to understand and maintain.</a:t>
             </a:r>
           </a:p>
         </p:txBody>
@@ -10211,7 +10211,7 @@
           <p:nvPr/>
         </p:nvPicPr>
         <p:blipFill>
-          <a:blip xmlns:r="http://schemas.openxmlformats.org/officeDocument/2006/relationships" xmlns:a="http://schemas.openxmlformats.org/drawingml/2006/main" r:embed="R20ab0b42c3e64a0a"/>
+          <a:blip xmlns:r="http://schemas.openxmlformats.org/officeDocument/2006/relationships" xmlns:a="http://schemas.openxmlformats.org/drawingml/2006/main" r:embed="Ra0ef2ace55b340d5"/>
           <a:stretch xmlns:a="http://schemas.openxmlformats.org/drawingml/2006/main"/>
         </p:blipFill>
         <p:spPr>
@@ -10509,7 +10509,7 @@
                 <a:ea typeface="DejaVu Sans"/>
                 <a:cs typeface="DejaVu Sans"/>
               </a:rPr>
-              <a:t>Logic error</a:t>
+              <a:t>Run-time environment</a:t>
             </a:r>
           </a:p>
         </p:txBody>
@@ -10698,7 +10698,7 @@
           <p:nvPr/>
         </p:nvPicPr>
         <p:blipFill>
-          <a:blip xmlns:r="http://schemas.openxmlformats.org/officeDocument/2006/relationships" xmlns:a="http://schemas.openxmlformats.org/drawingml/2006/main" r:embed="R96548371dd9e4c0f"/>
+          <a:blip xmlns:r="http://schemas.openxmlformats.org/officeDocument/2006/relationships" xmlns:a="http://schemas.openxmlformats.org/drawingml/2006/main" r:embed="R1370287ce6ea48f9"/>
           <a:stretch xmlns:a="http://schemas.openxmlformats.org/drawingml/2006/main"/>
         </p:blipFill>
         <p:spPr>
@@ -10938,7 +10938,7 @@
                 <a:ea typeface="DejaVu Sans"/>
                 <a:cs typeface="DejaVu Sans"/>
               </a:rPr>
-              <a:t>Logic error</a:t>
+              <a:t>Run-time environment</a:t>
             </a:r>
           </a:p>
         </p:txBody>
@@ -10996,7 +10996,7 @@
                 <a:ea typeface="DejaVu Sans"/>
                 <a:cs typeface="DejaVu Sans"/>
               </a:rPr>
-              <a:t>A mistake in a program’s reasoning that causes incorrect behaviour.</a:t>
+              <a:t>The facilities used to run a program and interact with it during execution.</a:t>
             </a:r>
           </a:p>
         </p:txBody>
@@ -11185,7 +11185,7 @@
           <p:nvPr/>
         </p:nvPicPr>
         <p:blipFill>
-          <a:blip xmlns:r="http://schemas.openxmlformats.org/officeDocument/2006/relationships" xmlns:a="http://schemas.openxmlformats.org/drawingml/2006/main" r:embed="R9c67e2e5ce7c4d1f"/>
+          <a:blip xmlns:r="http://schemas.openxmlformats.org/officeDocument/2006/relationships" xmlns:a="http://schemas.openxmlformats.org/drawingml/2006/main" r:embed="R30a2e08720ea4f1c"/>
           <a:stretch xmlns:a="http://schemas.openxmlformats.org/drawingml/2006/main"/>
         </p:blipFill>
         <p:spPr>
@@ -11904,7 +11904,7 @@
           <p:nvPr/>
         </p:nvPicPr>
         <p:blipFill>
-          <a:blip xmlns:r="http://schemas.openxmlformats.org/officeDocument/2006/relationships" xmlns:a="http://schemas.openxmlformats.org/drawingml/2006/main" r:embed="R08ba8737be9942d0"/>
+          <a:blip xmlns:r="http://schemas.openxmlformats.org/officeDocument/2006/relationships" xmlns:a="http://schemas.openxmlformats.org/drawingml/2006/main" r:embed="R9ea0e4b179e442b0"/>
           <a:stretch xmlns:a="http://schemas.openxmlformats.org/drawingml/2006/main"/>
         </p:blipFill>
         <p:spPr>
@@ -12275,7 +12275,7 @@
           <p:nvPr/>
         </p:nvPicPr>
         <p:blipFill>
-          <a:blip xmlns:r="http://schemas.openxmlformats.org/officeDocument/2006/relationships" xmlns:a="http://schemas.openxmlformats.org/drawingml/2006/main" r:embed="Rf3e6befaaf404883"/>
+          <a:blip xmlns:r="http://schemas.openxmlformats.org/officeDocument/2006/relationships" xmlns:a="http://schemas.openxmlformats.org/drawingml/2006/main" r:embed="Rd043841f51104e25"/>
           <a:stretch xmlns:a="http://schemas.openxmlformats.org/drawingml/2006/main"/>
         </p:blipFill>
         <p:spPr>
